--- a/gallery/pptx/fixtures/09-kitchen.pptx
+++ b/gallery/pptx/fixtures/09-kitchen.pptx
@@ -116,7 +116,7 @@
                 </a:solidFill>
                 <a:latin typeface="Calibri"/>
               </a:rPr>
-              <a:t>Kitchen sink — slide A</a:t>
+              <a:t xml:space="preserve">Kitchen sink — slide A</a:t>
             </a:r>
           </a:p>
         </p:txBody>
@@ -173,7 +173,7 @@
                 </a:solidFill>
                 <a:latin typeface="Calibri"/>
               </a:rPr>
-              <a:t>Shape + text + theme</a:t>
+              <a:t xml:space="preserve">Shape + text + theme</a:t>
             </a:r>
           </a:p>
         </p:txBody>
@@ -231,7 +231,7 @@
                 </a:solidFill>
                 <a:latin typeface="Calibri"/>
               </a:rPr>
-              <a:t>Kitchen sink — slide B</a:t>
+              <a:t xml:space="preserve">Kitchen sink — slide B</a:t>
             </a:r>
           </a:p>
         </p:txBody>
@@ -252,6 +252,28 @@
           <a:xfrm>
             <a:off x="914400" y="1371600"/>
             <a:ext cx="1828800" cy="1828800"/>
+          </a:xfrm>
+          <a:prstGeom prst="rect">
+            <a:avLst/>
+          </a:prstGeom>
+        </p:spPr>
+      </p:pic>
+      <p:pic>
+        <p:nvPicPr>
+          <p:cNvPr id="4" name="Photo"/>
+          <p:cNvPicPr/>
+          <p:nvPr/>
+        </p:nvPicPr>
+        <p:blipFill>
+          <a:blip r:embed="rId3"/>
+          <a:stretch>
+            <a:fillRect/>
+          </a:stretch>
+        </p:blipFill>
+        <p:spPr>
+          <a:xfrm>
+            <a:off x="3200400" y="4114800"/>
+            <a:ext cx="1828800" cy="1143000"/>
           </a:xfrm>
           <a:prstGeom prst="rect">
             <a:avLst/>
@@ -323,7 +345,7 @@
       </p:grpSp>
       <p:sp>
         <p:nvSpPr>
-          <p:cNvPr id="4" name="Footer"/>
+          <p:cNvPr id="5" name="Footer"/>
           <p:cNvSpPr txBox="1"/>
           <p:nvPr/>
         </p:nvSpPr>
@@ -349,7 +371,7 @@
                 </a:solidFill>
                 <a:latin typeface="Calibri"/>
               </a:rPr>
-              <a:t>Image + group on one slide</a:t>
+              <a:t xml:space="preserve">Image + group on one slide</a:t>
             </a:r>
           </a:p>
         </p:txBody>
